--- a/嵌入式影像處理_1107.pptx
+++ b/嵌入式影像處理_1107.pptx
@@ -5,21 +5,20 @@
     <p:sldMasterId id="2147483648" r:id="rId1"/>
   </p:sldMasterIdLst>
   <p:notesMasterIdLst>
-    <p:notesMasterId r:id="rId11"/>
+    <p:notesMasterId r:id="rId10"/>
   </p:notesMasterIdLst>
   <p:handoutMasterIdLst>
-    <p:handoutMasterId r:id="rId12"/>
+    <p:handoutMasterId r:id="rId11"/>
   </p:handoutMasterIdLst>
   <p:sldIdLst>
     <p:sldId id="258" r:id="rId2"/>
     <p:sldId id="280" r:id="rId3"/>
-    <p:sldId id="281" r:id="rId4"/>
+    <p:sldId id="290" r:id="rId4"/>
     <p:sldId id="282" r:id="rId5"/>
-    <p:sldId id="283" r:id="rId6"/>
-    <p:sldId id="284" r:id="rId7"/>
-    <p:sldId id="285" r:id="rId8"/>
-    <p:sldId id="286" r:id="rId9"/>
-    <p:sldId id="287" r:id="rId10"/>
+    <p:sldId id="288" r:id="rId6"/>
+    <p:sldId id="289" r:id="rId7"/>
+    <p:sldId id="291" r:id="rId8"/>
+    <p:sldId id="292" r:id="rId9"/>
   </p:sldIdLst>
   <p:sldSz cx="12192000" cy="6858000"/>
   <p:notesSz cx="6858000" cy="9144000"/>
@@ -125,13 +124,12 @@
           <p14:sldIdLst>
             <p14:sldId id="258"/>
             <p14:sldId id="280"/>
-            <p14:sldId id="281"/>
+            <p14:sldId id="290"/>
             <p14:sldId id="282"/>
-            <p14:sldId id="283"/>
-            <p14:sldId id="284"/>
-            <p14:sldId id="285"/>
-            <p14:sldId id="286"/>
-            <p14:sldId id="287"/>
+            <p14:sldId id="288"/>
+            <p14:sldId id="289"/>
+            <p14:sldId id="291"/>
+            <p14:sldId id="292"/>
           </p14:sldIdLst>
         </p14:section>
       </p14:sectionLst>
@@ -5782,7 +5780,7 @@
         <p:spPr>
           <a:xfrm>
             <a:off x="812478" y="1363070"/>
-            <a:ext cx="3406982" cy="923330"/>
+            <a:ext cx="6597972" cy="1200329"/>
           </a:xfrm>
           <a:prstGeom prst="rect">
             <a:avLst/>
@@ -5826,9 +5824,22 @@
           </a:p>
           <a:p>
             <a:pPr algn="just"/>
+            <a:endParaRPr lang="en-US" altLang="zh-TW" b="0" i="0" dirty="0">
+              <a:solidFill>
+                <a:srgbClr val="61AFEF"/>
+              </a:solidFill>
+              <a:effectLst/>
+              <a:latin typeface="Fira Code" pitchFamily="1" charset="0"/>
+            </a:endParaRPr>
+          </a:p>
+          <a:p>
+            <a:pPr marL="285750" indent="-285750" algn="just">
+              <a:buFont typeface="Arial" panose="020B0604020202020204" pitchFamily="34" charset="0"/>
+              <a:buChar char="•"/>
+            </a:pPr>
             <a:r>
               <a:rPr lang="zh-TW" altLang="en-US" dirty="0"/>
-              <a:t>輸入圖片，使用</a:t>
+              <a:t>輸入原始灰階圖片，使用</a:t>
             </a:r>
             <a:r>
               <a:rPr lang="en-US" altLang="zh-TW" dirty="0"/>
@@ -5836,7 +5847,51 @@
             </a:r>
             <a:r>
               <a:rPr lang="zh-TW" altLang="en-US" dirty="0"/>
-              <a:t>算子進行邊緣檢測，輸出</a:t>
+              <a:t>算子進行邊緣檢測</a:t>
+            </a:r>
+            <a:endParaRPr lang="en-US" altLang="zh-TW" dirty="0"/>
+          </a:p>
+          <a:p>
+            <a:pPr algn="just"/>
+            <a:endParaRPr lang="en-US" altLang="zh-TW" dirty="0"/>
+          </a:p>
+        </p:txBody>
+      </p:sp>
+      <p:sp>
+        <p:nvSpPr>
+          <p:cNvPr id="4" name="文字方塊 3">
+            <a:extLst>
+              <a:ext uri="{FF2B5EF4-FFF2-40B4-BE49-F238E27FC236}">
+                <a16:creationId xmlns:a16="http://schemas.microsoft.com/office/drawing/2014/main" id="{96FC9653-914C-05A2-70E5-7397996DBDAD}"/>
+              </a:ext>
+            </a:extLst>
+          </p:cNvPr>
+          <p:cNvSpPr txBox="1"/>
+          <p:nvPr/>
+        </p:nvSpPr>
+        <p:spPr>
+          <a:xfrm>
+            <a:off x="812478" y="2286800"/>
+            <a:ext cx="6096000" cy="369332"/>
+          </a:xfrm>
+          <a:prstGeom prst="rect">
+            <a:avLst/>
+          </a:prstGeom>
+          <a:noFill/>
+        </p:spPr>
+        <p:txBody>
+          <a:bodyPr wrap="square">
+            <a:spAutoFit/>
+          </a:bodyPr>
+          <a:lstStyle/>
+          <a:p>
+            <a:pPr marL="285750" indent="-285750" algn="just">
+              <a:buFont typeface="Arial" panose="020B0604020202020204" pitchFamily="34" charset="0"/>
+              <a:buChar char="•"/>
+            </a:pPr>
+            <a:r>
+              <a:rPr lang="zh-TW" altLang="en-US" dirty="0"/>
+              <a:t>輸出</a:t>
             </a:r>
             <a:r>
               <a:rPr lang="en-US" altLang="zh-TW" dirty="0" err="1"/>
@@ -5844,7 +5899,7 @@
             </a:r>
             <a:r>
               <a:rPr lang="zh-TW" altLang="en-US" dirty="0"/>
-              <a:t>邊緣圖</a:t>
+              <a:t>邊緣圖片</a:t>
             </a:r>
             <a:endParaRPr lang="en-US" altLang="zh-TW" dirty="0"/>
           </a:p>
@@ -5853,7 +5908,7 @@
     </p:spTree>
     <p:extLst>
       <p:ext uri="{BB962C8B-B14F-4D97-AF65-F5344CB8AC3E}">
-        <p14:creationId xmlns:p14="http://schemas.microsoft.com/office/powerpoint/2010/main" val="1904520658"/>
+        <p14:creationId xmlns:p14="http://schemas.microsoft.com/office/powerpoint/2010/main" val="1269598013"/>
       </p:ext>
     </p:extLst>
   </p:cSld>
@@ -5929,7 +5984,7 @@
         <p:spPr>
           <a:xfrm>
             <a:off x="812478" y="1363070"/>
-            <a:ext cx="2129026" cy="1200329"/>
+            <a:ext cx="9588822" cy="923330"/>
           </a:xfrm>
           <a:prstGeom prst="rect">
             <a:avLst/>
@@ -5973,9 +6028,42 @@
           </a:p>
           <a:p>
             <a:pPr algn="just"/>
+            <a:endParaRPr lang="en-US" altLang="zh-TW" b="0" i="0" dirty="0">
+              <a:solidFill>
+                <a:srgbClr val="61AFEF"/>
+              </a:solidFill>
+              <a:effectLst/>
+              <a:latin typeface="Fira Code" pitchFamily="1" charset="0"/>
+            </a:endParaRPr>
+          </a:p>
+          <a:p>
+            <a:pPr marL="285750" indent="-285750" algn="just">
+              <a:buFont typeface="Arial" panose="020B0604020202020204" pitchFamily="34" charset="0"/>
+              <a:buChar char="•"/>
+            </a:pPr>
             <a:r>
               <a:rPr lang="zh-TW" altLang="en-US" dirty="0"/>
-              <a:t>輸入圖片，進行</a:t>
+              <a:t>輸入圖片</a:t>
+            </a:r>
+            <a:r>
+              <a:rPr lang="en-US" altLang="zh-TW" dirty="0" err="1"/>
+              <a:t>img</a:t>
+            </a:r>
+            <a:r>
+              <a:rPr lang="en-US" altLang="zh-TW" dirty="0"/>
+              <a:t>, </a:t>
+            </a:r>
+            <a:r>
+              <a:rPr lang="en-US" altLang="zh-TW" dirty="0" err="1"/>
+              <a:t>N_points</a:t>
+            </a:r>
+            <a:r>
+              <a:rPr lang="en-US" altLang="zh-TW" dirty="0"/>
+              <a:t>=8, radius=1</a:t>
+            </a:r>
+            <a:r>
+              <a:rPr lang="zh-TW" altLang="en-US" dirty="0"/>
+              <a:t>，進行</a:t>
             </a:r>
             <a:r>
               <a:rPr lang="en-US" altLang="zh-TW" dirty="0" err="1"/>
@@ -5983,7 +6071,47 @@
             </a:r>
             <a:r>
               <a:rPr lang="zh-TW" altLang="en-US" dirty="0"/>
-              <a:t>，輸出</a:t>
+              <a:t>特徵提取</a:t>
+            </a:r>
+            <a:endParaRPr lang="en-US" altLang="zh-TW" dirty="0"/>
+          </a:p>
+        </p:txBody>
+      </p:sp>
+      <p:sp>
+        <p:nvSpPr>
+          <p:cNvPr id="4" name="文字方塊 3">
+            <a:extLst>
+              <a:ext uri="{FF2B5EF4-FFF2-40B4-BE49-F238E27FC236}">
+                <a16:creationId xmlns:a16="http://schemas.microsoft.com/office/drawing/2014/main" id="{96FC9653-914C-05A2-70E5-7397996DBDAD}"/>
+              </a:ext>
+            </a:extLst>
+          </p:cNvPr>
+          <p:cNvSpPr txBox="1"/>
+          <p:nvPr/>
+        </p:nvSpPr>
+        <p:spPr>
+          <a:xfrm>
+            <a:off x="812478" y="2286800"/>
+            <a:ext cx="6096000" cy="369332"/>
+          </a:xfrm>
+          <a:prstGeom prst="rect">
+            <a:avLst/>
+          </a:prstGeom>
+          <a:noFill/>
+        </p:spPr>
+        <p:txBody>
+          <a:bodyPr wrap="square">
+            <a:spAutoFit/>
+          </a:bodyPr>
+          <a:lstStyle/>
+          <a:p>
+            <a:pPr marL="285750" indent="-285750">
+              <a:buFont typeface="Arial" panose="020B0604020202020204" pitchFamily="34" charset="0"/>
+              <a:buChar char="•"/>
+            </a:pPr>
+            <a:r>
+              <a:rPr lang="zh-TW" altLang="en-US" dirty="0"/>
+              <a:t>輸出</a:t>
             </a:r>
             <a:r>
               <a:rPr lang="en-US" altLang="zh-TW" dirty="0"/>
@@ -5991,9 +6119,8 @@
             </a:r>
             <a:r>
               <a:rPr lang="zh-TW" altLang="en-US" dirty="0"/>
-              <a:t>特徵圖</a:t>
-            </a:r>
-            <a:endParaRPr lang="en-US" altLang="zh-TW" dirty="0"/>
+              <a:t>特徵向量圖</a:t>
+            </a:r>
           </a:p>
         </p:txBody>
       </p:sp>
@@ -6075,8 +6202,8 @@
         </p:nvSpPr>
         <p:spPr>
           <a:xfrm>
-            <a:off x="771181" y="1363070"/>
-            <a:ext cx="3844886" cy="923330"/>
+            <a:off x="812478" y="1363070"/>
+            <a:ext cx="6597972" cy="923330"/>
           </a:xfrm>
           <a:prstGeom prst="rect">
             <a:avLst/>
@@ -6120,32 +6247,86 @@
           </a:p>
           <a:p>
             <a:pPr algn="just"/>
+            <a:endParaRPr lang="en-US" altLang="zh-TW" b="0" i="0" dirty="0">
+              <a:solidFill>
+                <a:srgbClr val="61AFEF"/>
+              </a:solidFill>
+              <a:effectLst/>
+              <a:latin typeface="Fira Code" pitchFamily="1" charset="0"/>
+            </a:endParaRPr>
+          </a:p>
+          <a:p>
+            <a:pPr marL="285750" indent="-285750" algn="just">
+              <a:buFont typeface="Arial" panose="020B0604020202020204" pitchFamily="34" charset="0"/>
+              <a:buChar char="•"/>
+            </a:pPr>
             <a:r>
               <a:rPr lang="zh-TW" altLang="en-US" dirty="0"/>
-              <a:t>輸入圖片以及參數，進行</a:t>
-            </a:r>
-            <a:r>
-              <a:rPr lang="en-US" altLang="zh-TW" b="0" i="0" dirty="0" err="1">
-                <a:solidFill>
-                  <a:srgbClr val="ABB2BF"/>
-                </a:solidFill>
-                <a:effectLst/>
-                <a:latin typeface="Fira Code" pitchFamily="1" charset="0"/>
-              </a:rPr>
-              <a:t>np.histogram</a:t>
+              <a:t>輸入</a:t>
+            </a:r>
+            <a:r>
+              <a:rPr lang="en-US" altLang="zh-TW" dirty="0"/>
+              <a:t>LBP</a:t>
             </a:r>
             <a:r>
               <a:rPr lang="zh-TW" altLang="en-US" dirty="0"/>
-              <a:t>，輸出直方圖</a:t>
+              <a:t>特徵圖以及參數，計算直方圖用於相似度比對</a:t>
             </a:r>
             <a:endParaRPr lang="en-US" altLang="zh-TW" dirty="0"/>
+          </a:p>
+        </p:txBody>
+      </p:sp>
+      <p:sp>
+        <p:nvSpPr>
+          <p:cNvPr id="4" name="文字方塊 3">
+            <a:extLst>
+              <a:ext uri="{FF2B5EF4-FFF2-40B4-BE49-F238E27FC236}">
+                <a16:creationId xmlns:a16="http://schemas.microsoft.com/office/drawing/2014/main" id="{96FC9653-914C-05A2-70E5-7397996DBDAD}"/>
+              </a:ext>
+            </a:extLst>
+          </p:cNvPr>
+          <p:cNvSpPr txBox="1"/>
+          <p:nvPr/>
+        </p:nvSpPr>
+        <p:spPr>
+          <a:xfrm>
+            <a:off x="812478" y="2286800"/>
+            <a:ext cx="6096000" cy="369332"/>
+          </a:xfrm>
+          <a:prstGeom prst="rect">
+            <a:avLst/>
+          </a:prstGeom>
+          <a:noFill/>
+        </p:spPr>
+        <p:txBody>
+          <a:bodyPr wrap="square">
+            <a:spAutoFit/>
+          </a:bodyPr>
+          <a:lstStyle/>
+          <a:p>
+            <a:pPr marL="285750" indent="-285750">
+              <a:buFont typeface="Arial" panose="020B0604020202020204" pitchFamily="34" charset="0"/>
+              <a:buChar char="•"/>
+            </a:pPr>
+            <a:r>
+              <a:rPr lang="zh-TW" altLang="en-US" dirty="0"/>
+              <a:t>輸出</a:t>
+            </a:r>
+            <a:r>
+              <a:rPr lang="en-US" altLang="zh-TW" dirty="0"/>
+              <a:t>LBP</a:t>
+            </a:r>
+            <a:r>
+              <a:rPr lang="zh-TW" altLang="en-US" dirty="0"/>
+              <a:t>直方圖數值</a:t>
+            </a:r>
           </a:p>
         </p:txBody>
       </p:sp>
     </p:spTree>
     <p:extLst>
       <p:ext uri="{BB962C8B-B14F-4D97-AF65-F5344CB8AC3E}">
-        <p14:creationId xmlns:p14="http://schemas.microsoft.com/office/powerpoint/2010/main" val="2158356519"/>
+        <p14:creationId xmlns:p14="http://schemas.microsoft.com/office/powerpoint/2010/main" val="36422880"/>
       </p:ext>
     </p:extLst>
   </p:cSld>
@@ -6220,8 +6401,8 @@
         </p:nvSpPr>
         <p:spPr>
           <a:xfrm>
-            <a:off x="771181" y="1363070"/>
-            <a:ext cx="3844886" cy="923330"/>
+            <a:off x="812478" y="1363070"/>
+            <a:ext cx="6597972" cy="923330"/>
           </a:xfrm>
           <a:prstGeom prst="rect">
             <a:avLst/>
@@ -6243,7 +6424,7 @@
                 <a:effectLst/>
                 <a:latin typeface="Fira Code" pitchFamily="1" charset="0"/>
               </a:rPr>
-              <a:t>calculate_lbp_histogram</a:t>
+              <a:t>calculate_similarity</a:t>
             </a:r>
             <a:r>
               <a:rPr lang="zh-TW" altLang="en-US" b="0" i="0" dirty="0">
@@ -6265,32 +6446,94 @@
           </a:p>
           <a:p>
             <a:pPr algn="just"/>
+            <a:endParaRPr lang="en-US" altLang="zh-TW" b="0" i="0" dirty="0">
+              <a:solidFill>
+                <a:srgbClr val="61AFEF"/>
+              </a:solidFill>
+              <a:effectLst/>
+              <a:latin typeface="Fira Code" pitchFamily="1" charset="0"/>
+            </a:endParaRPr>
+          </a:p>
+          <a:p>
+            <a:pPr marL="285750" indent="-285750" algn="just">
+              <a:buFont typeface="Arial" panose="020B0604020202020204" pitchFamily="34" charset="0"/>
+              <a:buChar char="•"/>
+            </a:pPr>
             <a:r>
               <a:rPr lang="zh-TW" altLang="en-US" dirty="0"/>
-              <a:t>輸入圖片以及參數，進行</a:t>
-            </a:r>
-            <a:r>
-              <a:rPr lang="en-US" altLang="zh-TW" b="0" i="0" dirty="0" err="1">
-                <a:solidFill>
-                  <a:srgbClr val="ABB2BF"/>
-                </a:solidFill>
-                <a:effectLst/>
-                <a:latin typeface="Fira Code" pitchFamily="1" charset="0"/>
-              </a:rPr>
-              <a:t>np.histogram</a:t>
+              <a:t>輸入</a:t>
+            </a:r>
+            <a:r>
+              <a:rPr lang="en-US" altLang="zh-TW" dirty="0"/>
+              <a:t>LBP</a:t>
             </a:r>
             <a:r>
               <a:rPr lang="zh-TW" altLang="en-US" dirty="0"/>
-              <a:t>，輸出直方圖</a:t>
+              <a:t>特徵圖、</a:t>
+            </a:r>
+            <a:r>
+              <a:rPr lang="en-US" altLang="zh-TW" dirty="0"/>
+              <a:t>LBB</a:t>
+            </a:r>
+            <a:r>
+              <a:rPr lang="zh-TW" altLang="en-US" dirty="0"/>
+              <a:t>直方圖、</a:t>
+            </a:r>
+            <a:r>
+              <a:rPr lang="en-US" altLang="zh-TW" dirty="0"/>
+              <a:t>STRIDE</a:t>
+            </a:r>
+            <a:r>
+              <a:rPr lang="zh-TW" altLang="en-US" dirty="0"/>
+              <a:t>、比對闊值</a:t>
             </a:r>
             <a:endParaRPr lang="en-US" altLang="zh-TW" dirty="0"/>
+          </a:p>
+        </p:txBody>
+      </p:sp>
+      <p:sp>
+        <p:nvSpPr>
+          <p:cNvPr id="4" name="文字方塊 3">
+            <a:extLst>
+              <a:ext uri="{FF2B5EF4-FFF2-40B4-BE49-F238E27FC236}">
+                <a16:creationId xmlns:a16="http://schemas.microsoft.com/office/drawing/2014/main" id="{96FC9653-914C-05A2-70E5-7397996DBDAD}"/>
+              </a:ext>
+            </a:extLst>
+          </p:cNvPr>
+          <p:cNvSpPr txBox="1"/>
+          <p:nvPr/>
+        </p:nvSpPr>
+        <p:spPr>
+          <a:xfrm>
+            <a:off x="812478" y="2286800"/>
+            <a:ext cx="6096000" cy="369332"/>
+          </a:xfrm>
+          <a:prstGeom prst="rect">
+            <a:avLst/>
+          </a:prstGeom>
+          <a:noFill/>
+        </p:spPr>
+        <p:txBody>
+          <a:bodyPr wrap="square">
+            <a:spAutoFit/>
+          </a:bodyPr>
+          <a:lstStyle/>
+          <a:p>
+            <a:pPr marL="285750" indent="-285750">
+              <a:buFont typeface="Arial" panose="020B0604020202020204" pitchFamily="34" charset="0"/>
+              <a:buChar char="•"/>
+            </a:pPr>
+            <a:r>
+              <a:rPr lang="zh-TW" altLang="en-US" dirty="0"/>
+              <a:t>輸出相似分布值</a:t>
+            </a:r>
           </a:p>
         </p:txBody>
       </p:sp>
     </p:spTree>
     <p:extLst>
       <p:ext uri="{BB962C8B-B14F-4D97-AF65-F5344CB8AC3E}">
-        <p14:creationId xmlns:p14="http://schemas.microsoft.com/office/powerpoint/2010/main" val="1447592460"/>
+        <p14:creationId xmlns:p14="http://schemas.microsoft.com/office/powerpoint/2010/main" val="223035563"/>
       </p:ext>
     </p:extLst>
   </p:cSld>
@@ -6365,8 +6608,8 @@
         </p:nvSpPr>
         <p:spPr>
           <a:xfrm>
-            <a:off x="771181" y="1363070"/>
-            <a:ext cx="3844886" cy="923330"/>
+            <a:off x="812478" y="1363070"/>
+            <a:ext cx="6597972" cy="923330"/>
           </a:xfrm>
           <a:prstGeom prst="rect">
             <a:avLst/>
@@ -6388,7 +6631,7 @@
                 <a:effectLst/>
                 <a:latin typeface="Fira Code" pitchFamily="1" charset="0"/>
               </a:rPr>
-              <a:t>calculate_similarity</a:t>
+              <a:t>overlay_color</a:t>
             </a:r>
             <a:r>
               <a:rPr lang="zh-TW" altLang="en-US" b="0" i="0" dirty="0">
@@ -6410,26 +6653,70 @@
           </a:p>
           <a:p>
             <a:pPr algn="just"/>
+            <a:endParaRPr lang="en-US" altLang="zh-TW" b="0" i="0" dirty="0">
+              <a:solidFill>
+                <a:srgbClr val="61AFEF"/>
+              </a:solidFill>
+              <a:effectLst/>
+              <a:latin typeface="Fira Code" pitchFamily="1" charset="0"/>
+            </a:endParaRPr>
+          </a:p>
+          <a:p>
+            <a:pPr marL="285750" indent="-285750" algn="just">
+              <a:buFont typeface="Arial" panose="020B0604020202020204" pitchFamily="34" charset="0"/>
+              <a:buChar char="•"/>
+            </a:pPr>
             <a:r>
               <a:rPr lang="zh-TW" altLang="en-US" dirty="0"/>
-              <a:t>輸入</a:t>
-            </a:r>
-            <a:r>
-              <a:rPr lang="en-US" altLang="zh-TW" dirty="0"/>
-              <a:t>LBP</a:t>
-            </a:r>
+              <a:t>輸入原始圖片遮罩、相似分布值，將特定區域上色</a:t>
+            </a:r>
+            <a:endParaRPr lang="en-US" altLang="zh-TW" dirty="0"/>
+          </a:p>
+        </p:txBody>
+      </p:sp>
+      <p:sp>
+        <p:nvSpPr>
+          <p:cNvPr id="4" name="文字方塊 3">
+            <a:extLst>
+              <a:ext uri="{FF2B5EF4-FFF2-40B4-BE49-F238E27FC236}">
+                <a16:creationId xmlns:a16="http://schemas.microsoft.com/office/drawing/2014/main" id="{96FC9653-914C-05A2-70E5-7397996DBDAD}"/>
+              </a:ext>
+            </a:extLst>
+          </p:cNvPr>
+          <p:cNvSpPr txBox="1"/>
+          <p:nvPr/>
+        </p:nvSpPr>
+        <p:spPr>
+          <a:xfrm>
+            <a:off x="812478" y="2286800"/>
+            <a:ext cx="6096000" cy="369332"/>
+          </a:xfrm>
+          <a:prstGeom prst="rect">
+            <a:avLst/>
+          </a:prstGeom>
+          <a:noFill/>
+        </p:spPr>
+        <p:txBody>
+          <a:bodyPr wrap="square">
+            <a:spAutoFit/>
+          </a:bodyPr>
+          <a:lstStyle/>
+          <a:p>
+            <a:pPr marL="285750" indent="-285750">
+              <a:buFont typeface="Arial" panose="020B0604020202020204" pitchFamily="34" charset="0"/>
+              <a:buChar char="•"/>
+            </a:pPr>
             <a:r>
               <a:rPr lang="zh-TW" altLang="en-US" dirty="0"/>
-              <a:t>直方圖與闊值參數，計算特徵圖中相似的區域</a:t>
-            </a:r>
-            <a:endParaRPr lang="en-US" altLang="zh-TW" dirty="0"/>
+              <a:t>輸出上色後新遮罩</a:t>
+            </a:r>
           </a:p>
         </p:txBody>
       </p:sp>
     </p:spTree>
     <p:extLst>
       <p:ext uri="{BB962C8B-B14F-4D97-AF65-F5344CB8AC3E}">
-        <p14:creationId xmlns:p14="http://schemas.microsoft.com/office/powerpoint/2010/main" val="1465606268"/>
+        <p14:creationId xmlns:p14="http://schemas.microsoft.com/office/powerpoint/2010/main" val="1833555442"/>
       </p:ext>
     </p:extLst>
   </p:cSld>
@@ -6504,8 +6791,8 @@
         </p:nvSpPr>
         <p:spPr>
           <a:xfrm>
-            <a:off x="771181" y="1363070"/>
-            <a:ext cx="3844886" cy="646331"/>
+            <a:off x="812478" y="1363070"/>
+            <a:ext cx="6597972" cy="923330"/>
           </a:xfrm>
           <a:prstGeom prst="rect">
             <a:avLst/>
@@ -6527,7 +6814,7 @@
                 <a:effectLst/>
                 <a:latin typeface="Fira Code" pitchFamily="1" charset="0"/>
               </a:rPr>
-              <a:t>overlay_color</a:t>
+              <a:t>Display_result</a:t>
             </a:r>
             <a:r>
               <a:rPr lang="zh-TW" altLang="en-US" b="0" i="0" dirty="0">
@@ -6549,127 +6836,6 @@
           </a:p>
           <a:p>
             <a:pPr algn="just"/>
-            <a:r>
-              <a:rPr lang="zh-TW" altLang="en-US" dirty="0"/>
-              <a:t>輸入原始圖片，將特定區域塗上顏色</a:t>
-            </a:r>
-            <a:endParaRPr lang="en-US" altLang="zh-TW" dirty="0"/>
-          </a:p>
-        </p:txBody>
-      </p:sp>
-    </p:spTree>
-    <p:extLst>
-      <p:ext uri="{BB962C8B-B14F-4D97-AF65-F5344CB8AC3E}">
-        <p14:creationId xmlns:p14="http://schemas.microsoft.com/office/powerpoint/2010/main" val="4242514224"/>
-      </p:ext>
-    </p:extLst>
-  </p:cSld>
-  <p:clrMapOvr>
-    <a:masterClrMapping/>
-  </p:clrMapOvr>
-</p:sld>
-</file>
-
-<file path=ppt/slides/slide9.xml><?xml version="1.0" encoding="utf-8"?>
-<p:sld xmlns:a="http://schemas.openxmlformats.org/drawingml/2006/main" xmlns:r="http://schemas.openxmlformats.org/officeDocument/2006/relationships" xmlns:p="http://schemas.openxmlformats.org/presentationml/2006/main">
-  <p:cSld>
-    <p:spTree>
-      <p:nvGrpSpPr>
-        <p:cNvPr id="1" name=""/>
-        <p:cNvGrpSpPr/>
-        <p:nvPr/>
-      </p:nvGrpSpPr>
-      <p:grpSpPr>
-        <a:xfrm>
-          <a:off x="0" y="0"/>
-          <a:ext cx="0" cy="0"/>
-          <a:chOff x="0" y="0"/>
-          <a:chExt cx="0" cy="0"/>
-        </a:xfrm>
-      </p:grpSpPr>
-      <p:sp>
-        <p:nvSpPr>
-          <p:cNvPr id="2" name="標題 1">
-            <a:extLst>
-              <a:ext uri="{FF2B5EF4-FFF2-40B4-BE49-F238E27FC236}">
-                <a16:creationId xmlns:a16="http://schemas.microsoft.com/office/drawing/2014/main" id="{B81DA525-EDE2-4E29-8D18-3F61AD806950}"/>
-              </a:ext>
-            </a:extLst>
-          </p:cNvPr>
-          <p:cNvSpPr>
-            <a:spLocks noGrp="1"/>
-          </p:cNvSpPr>
-          <p:nvPr>
-            <p:ph type="title"/>
-          </p:nvPr>
-        </p:nvSpPr>
-        <p:spPr>
-          <a:xfrm>
-            <a:off x="583394" y="-88086"/>
-            <a:ext cx="10515600" cy="1325563"/>
-          </a:xfrm>
-        </p:spPr>
-        <p:txBody>
-          <a:bodyPr/>
-          <a:lstStyle/>
-          <a:p>
-            <a:r>
-              <a:rPr lang="en-US" altLang="zh-TW" b="1"/>
-              <a:t>API</a:t>
-            </a:r>
-            <a:endParaRPr lang="zh-TW" altLang="en-US" b="1" dirty="0"/>
-          </a:p>
-        </p:txBody>
-      </p:sp>
-      <p:sp>
-        <p:nvSpPr>
-          <p:cNvPr id="102" name="文字方塊 101">
-            <a:extLst>
-              <a:ext uri="{FF2B5EF4-FFF2-40B4-BE49-F238E27FC236}">
-                <a16:creationId xmlns:a16="http://schemas.microsoft.com/office/drawing/2014/main" id="{9237EB1F-043D-F9D8-B294-A62F59C8DB91}"/>
-              </a:ext>
-            </a:extLst>
-          </p:cNvPr>
-          <p:cNvSpPr txBox="1"/>
-          <p:nvPr/>
-        </p:nvSpPr>
-        <p:spPr>
-          <a:xfrm>
-            <a:off x="771181" y="1363070"/>
-            <a:ext cx="3844886" cy="646331"/>
-          </a:xfrm>
-          <a:prstGeom prst="rect">
-            <a:avLst/>
-          </a:prstGeom>
-          <a:noFill/>
-        </p:spPr>
-        <p:txBody>
-          <a:bodyPr wrap="square">
-            <a:spAutoFit/>
-          </a:bodyPr>
-          <a:lstStyle/>
-          <a:p>
-            <a:pPr algn="just"/>
-            <a:r>
-              <a:rPr lang="en-US" altLang="zh-TW" b="0" i="0" dirty="0" err="1">
-                <a:solidFill>
-                  <a:srgbClr val="61AFEF"/>
-                </a:solidFill>
-                <a:effectLst/>
-                <a:latin typeface="Fira Code" pitchFamily="1" charset="0"/>
-              </a:rPr>
-              <a:t>Display_result</a:t>
-            </a:r>
-            <a:r>
-              <a:rPr lang="zh-TW" altLang="en-US" b="0" i="0" dirty="0">
-                <a:solidFill>
-                  <a:srgbClr val="61AFEF"/>
-                </a:solidFill>
-                <a:effectLst/>
-                <a:latin typeface="Fira Code" pitchFamily="1" charset="0"/>
-              </a:rPr>
-              <a:t>：</a:t>
-            </a:r>
             <a:endParaRPr lang="en-US" altLang="zh-TW" b="0" i="0" dirty="0">
               <a:solidFill>
                 <a:srgbClr val="61AFEF"/>
@@ -6679,19 +6845,69 @@
             </a:endParaRPr>
           </a:p>
           <a:p>
-            <a:pPr algn="just"/>
+            <a:pPr marL="285750" indent="-285750" algn="just">
+              <a:buFont typeface="Arial" panose="020B0604020202020204" pitchFamily="34" charset="0"/>
+              <a:buChar char="•"/>
+            </a:pPr>
             <a:r>
               <a:rPr lang="zh-TW" altLang="en-US" dirty="0"/>
-              <a:t>顯示結果</a:t>
+              <a:t>輸入上色後的遮罩，再進行</a:t>
+            </a:r>
+            <a:r>
+              <a:rPr lang="en-US" altLang="zh-TW" dirty="0" err="1"/>
+              <a:t>imshow</a:t>
+            </a:r>
+            <a:r>
+              <a:rPr lang="zh-TW" altLang="en-US" dirty="0"/>
+              <a:t>顯示</a:t>
             </a:r>
             <a:endParaRPr lang="en-US" altLang="zh-TW" dirty="0"/>
+          </a:p>
+        </p:txBody>
+      </p:sp>
+      <p:sp>
+        <p:nvSpPr>
+          <p:cNvPr id="4" name="文字方塊 3">
+            <a:extLst>
+              <a:ext uri="{FF2B5EF4-FFF2-40B4-BE49-F238E27FC236}">
+                <a16:creationId xmlns:a16="http://schemas.microsoft.com/office/drawing/2014/main" id="{96FC9653-914C-05A2-70E5-7397996DBDAD}"/>
+              </a:ext>
+            </a:extLst>
+          </p:cNvPr>
+          <p:cNvSpPr txBox="1"/>
+          <p:nvPr/>
+        </p:nvSpPr>
+        <p:spPr>
+          <a:xfrm>
+            <a:off x="812478" y="2286800"/>
+            <a:ext cx="6096000" cy="369332"/>
+          </a:xfrm>
+          <a:prstGeom prst="rect">
+            <a:avLst/>
+          </a:prstGeom>
+          <a:noFill/>
+        </p:spPr>
+        <p:txBody>
+          <a:bodyPr wrap="square">
+            <a:spAutoFit/>
+          </a:bodyPr>
+          <a:lstStyle/>
+          <a:p>
+            <a:pPr marL="285750" indent="-285750">
+              <a:buFont typeface="Arial" panose="020B0604020202020204" pitchFamily="34" charset="0"/>
+              <a:buChar char="•"/>
+            </a:pPr>
+            <a:r>
+              <a:rPr lang="zh-TW" altLang="en-US" dirty="0"/>
+              <a:t>輸出：無</a:t>
+            </a:r>
           </a:p>
         </p:txBody>
       </p:sp>
     </p:spTree>
     <p:extLst>
       <p:ext uri="{BB962C8B-B14F-4D97-AF65-F5344CB8AC3E}">
-        <p14:creationId xmlns:p14="http://schemas.microsoft.com/office/powerpoint/2010/main" val="2472168816"/>
+        <p14:creationId xmlns:p14="http://schemas.microsoft.com/office/powerpoint/2010/main" val="4050751438"/>
       </p:ext>
     </p:extLst>
   </p:cSld>

--- a/嵌入式影像處理_1107.pptx
+++ b/嵌入式影像處理_1107.pptx
@@ -5,20 +5,21 @@
     <p:sldMasterId id="2147483648" r:id="rId1"/>
   </p:sldMasterIdLst>
   <p:notesMasterIdLst>
-    <p:notesMasterId r:id="rId10"/>
+    <p:notesMasterId r:id="rId11"/>
   </p:notesMasterIdLst>
   <p:handoutMasterIdLst>
-    <p:handoutMasterId r:id="rId11"/>
+    <p:handoutMasterId r:id="rId12"/>
   </p:handoutMasterIdLst>
   <p:sldIdLst>
     <p:sldId id="258" r:id="rId2"/>
-    <p:sldId id="280" r:id="rId3"/>
-    <p:sldId id="290" r:id="rId4"/>
-    <p:sldId id="282" r:id="rId5"/>
-    <p:sldId id="288" r:id="rId6"/>
-    <p:sldId id="289" r:id="rId7"/>
-    <p:sldId id="291" r:id="rId8"/>
-    <p:sldId id="292" r:id="rId9"/>
+    <p:sldId id="293" r:id="rId3"/>
+    <p:sldId id="280" r:id="rId4"/>
+    <p:sldId id="290" r:id="rId5"/>
+    <p:sldId id="282" r:id="rId6"/>
+    <p:sldId id="288" r:id="rId7"/>
+    <p:sldId id="289" r:id="rId8"/>
+    <p:sldId id="291" r:id="rId9"/>
+    <p:sldId id="292" r:id="rId10"/>
   </p:sldIdLst>
   <p:sldSz cx="12192000" cy="6858000"/>
   <p:notesSz cx="6858000" cy="9144000"/>
@@ -123,6 +124,7 @@
         <p14:section name="設計" id="{5840EF85-AC94-4CF0-A851-81CC79AAFBB4}">
           <p14:sldIdLst>
             <p14:sldId id="258"/>
+            <p14:sldId id="293"/>
             <p14:sldId id="280"/>
             <p14:sldId id="290"/>
             <p14:sldId id="282"/>
@@ -4307,6 +4309,164 @@
           <a:lstStyle/>
           <a:p>
             <a:r>
+              <a:rPr lang="zh-TW" altLang="en-US" dirty="0"/>
+              <a:t>設計 </a:t>
+            </a:r>
+            <a:r>
+              <a:rPr lang="en-US" altLang="zh-TW" dirty="0"/>
+              <a:t>– Break</a:t>
+            </a:r>
+            <a:r>
+              <a:rPr lang="zh-TW" altLang="en-US" dirty="0"/>
+              <a:t> </a:t>
+            </a:r>
+            <a:r>
+              <a:rPr lang="en-US" altLang="zh-TW" dirty="0"/>
+              <a:t>Down</a:t>
+            </a:r>
+            <a:endParaRPr lang="zh-TW" altLang="en-US" b="1" dirty="0"/>
+          </a:p>
+        </p:txBody>
+      </p:sp>
+      <p:pic>
+        <p:nvPicPr>
+          <p:cNvPr id="4" name="圖片 3">
+            <a:extLst>
+              <a:ext uri="{FF2B5EF4-FFF2-40B4-BE49-F238E27FC236}">
+                <a16:creationId xmlns:a16="http://schemas.microsoft.com/office/drawing/2014/main" id="{63256B5A-BFF6-0562-3F56-EC8EAE9B9586}"/>
+              </a:ext>
+            </a:extLst>
+          </p:cNvPr>
+          <p:cNvPicPr>
+            <a:picLocks noChangeAspect="1"/>
+          </p:cNvPicPr>
+          <p:nvPr/>
+        </p:nvPicPr>
+        <p:blipFill>
+          <a:blip r:embed="rId2"/>
+          <a:stretch>
+            <a:fillRect/>
+          </a:stretch>
+        </p:blipFill>
+        <p:spPr>
+          <a:xfrm>
+            <a:off x="1318333" y="1332727"/>
+            <a:ext cx="9555334" cy="4800600"/>
+          </a:xfrm>
+          <a:prstGeom prst="rect">
+            <a:avLst/>
+          </a:prstGeom>
+        </p:spPr>
+      </p:pic>
+      <p:sp>
+        <p:nvSpPr>
+          <p:cNvPr id="5" name="矩形 4">
+            <a:extLst>
+              <a:ext uri="{FF2B5EF4-FFF2-40B4-BE49-F238E27FC236}">
+                <a16:creationId xmlns:a16="http://schemas.microsoft.com/office/drawing/2014/main" id="{40D52C3B-3611-54C3-7981-802C2F67B68C}"/>
+              </a:ext>
+            </a:extLst>
+          </p:cNvPr>
+          <p:cNvSpPr/>
+          <p:nvPr/>
+        </p:nvSpPr>
+        <p:spPr>
+          <a:xfrm>
+            <a:off x="7753350" y="5210175"/>
+            <a:ext cx="1809750" cy="923152"/>
+          </a:xfrm>
+          <a:prstGeom prst="rect">
+            <a:avLst/>
+          </a:prstGeom>
+          <a:solidFill>
+            <a:schemeClr val="bg1"/>
+          </a:solidFill>
+          <a:ln>
+            <a:noFill/>
+          </a:ln>
+        </p:spPr>
+        <p:style>
+          <a:lnRef idx="2">
+            <a:schemeClr val="accent1">
+              <a:shade val="15000"/>
+            </a:schemeClr>
+          </a:lnRef>
+          <a:fillRef idx="1">
+            <a:schemeClr val="accent1"/>
+          </a:fillRef>
+          <a:effectRef idx="0">
+            <a:schemeClr val="accent1"/>
+          </a:effectRef>
+          <a:fontRef idx="minor">
+            <a:schemeClr val="lt1"/>
+          </a:fontRef>
+        </p:style>
+        <p:txBody>
+          <a:bodyPr rtlCol="0" anchor="ctr"/>
+          <a:lstStyle/>
+          <a:p>
+            <a:pPr algn="ctr"/>
+            <a:endParaRPr lang="zh-TW" altLang="en-US"/>
+          </a:p>
+        </p:txBody>
+      </p:sp>
+    </p:spTree>
+    <p:extLst>
+      <p:ext uri="{BB962C8B-B14F-4D97-AF65-F5344CB8AC3E}">
+        <p14:creationId xmlns:p14="http://schemas.microsoft.com/office/powerpoint/2010/main" val="3770862104"/>
+      </p:ext>
+    </p:extLst>
+  </p:cSld>
+  <p:clrMapOvr>
+    <a:masterClrMapping/>
+  </p:clrMapOvr>
+</p:sld>
+</file>
+
+<file path=ppt/slides/slide3.xml><?xml version="1.0" encoding="utf-8"?>
+<p:sld xmlns:a="http://schemas.openxmlformats.org/drawingml/2006/main" xmlns:r="http://schemas.openxmlformats.org/officeDocument/2006/relationships" xmlns:p="http://schemas.openxmlformats.org/presentationml/2006/main">
+  <p:cSld>
+    <p:spTree>
+      <p:nvGrpSpPr>
+        <p:cNvPr id="1" name=""/>
+        <p:cNvGrpSpPr/>
+        <p:nvPr/>
+      </p:nvGrpSpPr>
+      <p:grpSpPr>
+        <a:xfrm>
+          <a:off x="0" y="0"/>
+          <a:ext cx="0" cy="0"/>
+          <a:chOff x="0" y="0"/>
+          <a:chExt cx="0" cy="0"/>
+        </a:xfrm>
+      </p:grpSpPr>
+      <p:sp>
+        <p:nvSpPr>
+          <p:cNvPr id="2" name="標題 1">
+            <a:extLst>
+              <a:ext uri="{FF2B5EF4-FFF2-40B4-BE49-F238E27FC236}">
+                <a16:creationId xmlns:a16="http://schemas.microsoft.com/office/drawing/2014/main" id="{B81DA525-EDE2-4E29-8D18-3F61AD806950}"/>
+              </a:ext>
+            </a:extLst>
+          </p:cNvPr>
+          <p:cNvSpPr>
+            <a:spLocks noGrp="1"/>
+          </p:cNvSpPr>
+          <p:nvPr>
+            <p:ph type="title"/>
+          </p:nvPr>
+        </p:nvSpPr>
+        <p:spPr>
+          <a:xfrm>
+            <a:off x="583394" y="-88086"/>
+            <a:ext cx="10515600" cy="1325563"/>
+          </a:xfrm>
+        </p:spPr>
+        <p:txBody>
+          <a:bodyPr/>
+          <a:lstStyle/>
+          <a:p>
+            <a:r>
               <a:rPr lang="zh-TW" altLang="en-US" b="1" dirty="0"/>
               <a:t>流程</a:t>
             </a:r>
@@ -5714,210 +5874,6 @@
 </p:sld>
 </file>
 
-<file path=ppt/slides/slide3.xml><?xml version="1.0" encoding="utf-8"?>
-<p:sld xmlns:a="http://schemas.openxmlformats.org/drawingml/2006/main" xmlns:r="http://schemas.openxmlformats.org/officeDocument/2006/relationships" xmlns:p="http://schemas.openxmlformats.org/presentationml/2006/main">
-  <p:cSld>
-    <p:spTree>
-      <p:nvGrpSpPr>
-        <p:cNvPr id="1" name=""/>
-        <p:cNvGrpSpPr/>
-        <p:nvPr/>
-      </p:nvGrpSpPr>
-      <p:grpSpPr>
-        <a:xfrm>
-          <a:off x="0" y="0"/>
-          <a:ext cx="0" cy="0"/>
-          <a:chOff x="0" y="0"/>
-          <a:chExt cx="0" cy="0"/>
-        </a:xfrm>
-      </p:grpSpPr>
-      <p:sp>
-        <p:nvSpPr>
-          <p:cNvPr id="2" name="標題 1">
-            <a:extLst>
-              <a:ext uri="{FF2B5EF4-FFF2-40B4-BE49-F238E27FC236}">
-                <a16:creationId xmlns:a16="http://schemas.microsoft.com/office/drawing/2014/main" id="{B81DA525-EDE2-4E29-8D18-3F61AD806950}"/>
-              </a:ext>
-            </a:extLst>
-          </p:cNvPr>
-          <p:cNvSpPr>
-            <a:spLocks noGrp="1"/>
-          </p:cNvSpPr>
-          <p:nvPr>
-            <p:ph type="title"/>
-          </p:nvPr>
-        </p:nvSpPr>
-        <p:spPr>
-          <a:xfrm>
-            <a:off x="583394" y="-88086"/>
-            <a:ext cx="10515600" cy="1325563"/>
-          </a:xfrm>
-        </p:spPr>
-        <p:txBody>
-          <a:bodyPr/>
-          <a:lstStyle/>
-          <a:p>
-            <a:r>
-              <a:rPr lang="en-US" altLang="zh-TW" b="1" dirty="0"/>
-              <a:t>API</a:t>
-            </a:r>
-            <a:endParaRPr lang="zh-TW" altLang="en-US" b="1" dirty="0"/>
-          </a:p>
-        </p:txBody>
-      </p:sp>
-      <p:sp>
-        <p:nvSpPr>
-          <p:cNvPr id="102" name="文字方塊 101">
-            <a:extLst>
-              <a:ext uri="{FF2B5EF4-FFF2-40B4-BE49-F238E27FC236}">
-                <a16:creationId xmlns:a16="http://schemas.microsoft.com/office/drawing/2014/main" id="{9237EB1F-043D-F9D8-B294-A62F59C8DB91}"/>
-              </a:ext>
-            </a:extLst>
-          </p:cNvPr>
-          <p:cNvSpPr txBox="1"/>
-          <p:nvPr/>
-        </p:nvSpPr>
-        <p:spPr>
-          <a:xfrm>
-            <a:off x="812478" y="1363070"/>
-            <a:ext cx="6597972" cy="1200329"/>
-          </a:xfrm>
-          <a:prstGeom prst="rect">
-            <a:avLst/>
-          </a:prstGeom>
-          <a:noFill/>
-        </p:spPr>
-        <p:txBody>
-          <a:bodyPr wrap="square">
-            <a:spAutoFit/>
-          </a:bodyPr>
-          <a:lstStyle/>
-          <a:p>
-            <a:pPr algn="just"/>
-            <a:r>
-              <a:rPr lang="en-US" altLang="zh-TW" b="0" i="0" dirty="0" err="1">
-                <a:solidFill>
-                  <a:srgbClr val="61AFEF"/>
-                </a:solidFill>
-                <a:effectLst/>
-                <a:latin typeface="Fira Code" pitchFamily="1" charset="0"/>
-              </a:rPr>
-              <a:t>preprocess_with_sobel</a:t>
-            </a:r>
-            <a:r>
-              <a:rPr lang="zh-TW" altLang="en-US" b="0" i="0" dirty="0">
-                <a:solidFill>
-                  <a:srgbClr val="61AFEF"/>
-                </a:solidFill>
-                <a:effectLst/>
-                <a:latin typeface="Fira Code" pitchFamily="1" charset="0"/>
-              </a:rPr>
-              <a:t>：</a:t>
-            </a:r>
-            <a:endParaRPr lang="en-US" altLang="zh-TW" b="0" i="0" dirty="0">
-              <a:solidFill>
-                <a:srgbClr val="61AFEF"/>
-              </a:solidFill>
-              <a:effectLst/>
-              <a:latin typeface="Fira Code" pitchFamily="1" charset="0"/>
-            </a:endParaRPr>
-          </a:p>
-          <a:p>
-            <a:pPr algn="just"/>
-            <a:endParaRPr lang="en-US" altLang="zh-TW" b="0" i="0" dirty="0">
-              <a:solidFill>
-                <a:srgbClr val="61AFEF"/>
-              </a:solidFill>
-              <a:effectLst/>
-              <a:latin typeface="Fira Code" pitchFamily="1" charset="0"/>
-            </a:endParaRPr>
-          </a:p>
-          <a:p>
-            <a:pPr marL="285750" indent="-285750" algn="just">
-              <a:buFont typeface="Arial" panose="020B0604020202020204" pitchFamily="34" charset="0"/>
-              <a:buChar char="•"/>
-            </a:pPr>
-            <a:r>
-              <a:rPr lang="zh-TW" altLang="en-US" dirty="0"/>
-              <a:t>輸入原始灰階圖片，使用</a:t>
-            </a:r>
-            <a:r>
-              <a:rPr lang="en-US" altLang="zh-TW" dirty="0"/>
-              <a:t>Sobel</a:t>
-            </a:r>
-            <a:r>
-              <a:rPr lang="zh-TW" altLang="en-US" dirty="0"/>
-              <a:t>算子進行邊緣檢測</a:t>
-            </a:r>
-            <a:endParaRPr lang="en-US" altLang="zh-TW" dirty="0"/>
-          </a:p>
-          <a:p>
-            <a:pPr algn="just"/>
-            <a:endParaRPr lang="en-US" altLang="zh-TW" dirty="0"/>
-          </a:p>
-        </p:txBody>
-      </p:sp>
-      <p:sp>
-        <p:nvSpPr>
-          <p:cNvPr id="4" name="文字方塊 3">
-            <a:extLst>
-              <a:ext uri="{FF2B5EF4-FFF2-40B4-BE49-F238E27FC236}">
-                <a16:creationId xmlns:a16="http://schemas.microsoft.com/office/drawing/2014/main" id="{96FC9653-914C-05A2-70E5-7397996DBDAD}"/>
-              </a:ext>
-            </a:extLst>
-          </p:cNvPr>
-          <p:cNvSpPr txBox="1"/>
-          <p:nvPr/>
-        </p:nvSpPr>
-        <p:spPr>
-          <a:xfrm>
-            <a:off x="812478" y="2286800"/>
-            <a:ext cx="6096000" cy="369332"/>
-          </a:xfrm>
-          <a:prstGeom prst="rect">
-            <a:avLst/>
-          </a:prstGeom>
-          <a:noFill/>
-        </p:spPr>
-        <p:txBody>
-          <a:bodyPr wrap="square">
-            <a:spAutoFit/>
-          </a:bodyPr>
-          <a:lstStyle/>
-          <a:p>
-            <a:pPr marL="285750" indent="-285750" algn="just">
-              <a:buFont typeface="Arial" panose="020B0604020202020204" pitchFamily="34" charset="0"/>
-              <a:buChar char="•"/>
-            </a:pPr>
-            <a:r>
-              <a:rPr lang="zh-TW" altLang="en-US" dirty="0"/>
-              <a:t>輸出</a:t>
-            </a:r>
-            <a:r>
-              <a:rPr lang="en-US" altLang="zh-TW" dirty="0" err="1"/>
-              <a:t>sobel</a:t>
-            </a:r>
-            <a:r>
-              <a:rPr lang="zh-TW" altLang="en-US" dirty="0"/>
-              <a:t>邊緣圖片</a:t>
-            </a:r>
-            <a:endParaRPr lang="en-US" altLang="zh-TW" dirty="0"/>
-          </a:p>
-        </p:txBody>
-      </p:sp>
-    </p:spTree>
-    <p:extLst>
-      <p:ext uri="{BB962C8B-B14F-4D97-AF65-F5344CB8AC3E}">
-        <p14:creationId xmlns:p14="http://schemas.microsoft.com/office/powerpoint/2010/main" val="1269598013"/>
-      </p:ext>
-    </p:extLst>
-  </p:cSld>
-  <p:clrMapOvr>
-    <a:masterClrMapping/>
-  </p:clrMapOvr>
-</p:sld>
-</file>
-
 <file path=ppt/slides/slide4.xml><?xml version="1.0" encoding="utf-8"?>
 <p:sld xmlns:a="http://schemas.openxmlformats.org/drawingml/2006/main" xmlns:r="http://schemas.openxmlformats.org/officeDocument/2006/relationships" xmlns:p="http://schemas.openxmlformats.org/presentationml/2006/main">
   <p:cSld>
@@ -5984,7 +5940,7 @@
         <p:spPr>
           <a:xfrm>
             <a:off x="812478" y="1363070"/>
-            <a:ext cx="9588822" cy="923330"/>
+            <a:ext cx="6597972" cy="1200329"/>
           </a:xfrm>
           <a:prstGeom prst="rect">
             <a:avLst/>
@@ -6006,7 +5962,7 @@
                 <a:effectLst/>
                 <a:latin typeface="Fira Code" pitchFamily="1" charset="0"/>
               </a:rPr>
-              <a:t>lbp</a:t>
+              <a:t>preprocess_with_sobel</a:t>
             </a:r>
             <a:r>
               <a:rPr lang="zh-TW" altLang="en-US" b="0" i="0" dirty="0">
@@ -6043,36 +5999,20 @@
             </a:pPr>
             <a:r>
               <a:rPr lang="zh-TW" altLang="en-US" dirty="0"/>
-              <a:t>輸入圖片</a:t>
-            </a:r>
-            <a:r>
-              <a:rPr lang="en-US" altLang="zh-TW" dirty="0" err="1"/>
-              <a:t>img</a:t>
+              <a:t>輸入原始灰階圖片，使用</a:t>
             </a:r>
             <a:r>
               <a:rPr lang="en-US" altLang="zh-TW" dirty="0"/>
-              <a:t>, </a:t>
-            </a:r>
-            <a:r>
-              <a:rPr lang="en-US" altLang="zh-TW" dirty="0" err="1"/>
-              <a:t>N_points</a:t>
-            </a:r>
-            <a:r>
-              <a:rPr lang="en-US" altLang="zh-TW" dirty="0"/>
-              <a:t>=8, radius=1</a:t>
+              <a:t>Sobel</a:t>
             </a:r>
             <a:r>
               <a:rPr lang="zh-TW" altLang="en-US" dirty="0"/>
-              <a:t>，進行</a:t>
-            </a:r>
-            <a:r>
-              <a:rPr lang="en-US" altLang="zh-TW" dirty="0" err="1"/>
-              <a:t>local_binary_pattern</a:t>
-            </a:r>
-            <a:r>
-              <a:rPr lang="zh-TW" altLang="en-US" dirty="0"/>
-              <a:t>特徵提取</a:t>
-            </a:r>
+              <a:t>算子進行邊緣檢測</a:t>
+            </a:r>
+            <a:endParaRPr lang="en-US" altLang="zh-TW" dirty="0"/>
+          </a:p>
+          <a:p>
+            <a:pPr algn="just"/>
             <a:endParaRPr lang="en-US" altLang="zh-TW" dirty="0"/>
           </a:p>
         </p:txBody>
@@ -6105,7 +6045,7 @@
           </a:bodyPr>
           <a:lstStyle/>
           <a:p>
-            <a:pPr marL="285750" indent="-285750">
+            <a:pPr marL="285750" indent="-285750" algn="just">
               <a:buFont typeface="Arial" panose="020B0604020202020204" pitchFamily="34" charset="0"/>
               <a:buChar char="•"/>
             </a:pPr>
@@ -6114,20 +6054,21 @@
               <a:t>輸出</a:t>
             </a:r>
             <a:r>
-              <a:rPr lang="en-US" altLang="zh-TW" dirty="0"/>
-              <a:t>LBP</a:t>
+              <a:rPr lang="en-US" altLang="zh-TW" dirty="0" err="1"/>
+              <a:t>sobel</a:t>
             </a:r>
             <a:r>
               <a:rPr lang="zh-TW" altLang="en-US" dirty="0"/>
-              <a:t>特徵向量圖</a:t>
-            </a:r>
+              <a:t>邊緣圖片</a:t>
+            </a:r>
+            <a:endParaRPr lang="en-US" altLang="zh-TW" dirty="0"/>
           </a:p>
         </p:txBody>
       </p:sp>
     </p:spTree>
     <p:extLst>
       <p:ext uri="{BB962C8B-B14F-4D97-AF65-F5344CB8AC3E}">
-        <p14:creationId xmlns:p14="http://schemas.microsoft.com/office/powerpoint/2010/main" val="2308324488"/>
+        <p14:creationId xmlns:p14="http://schemas.microsoft.com/office/powerpoint/2010/main" val="1269598013"/>
       </p:ext>
     </p:extLst>
   </p:cSld>
@@ -6203,7 +6144,7 @@
         <p:spPr>
           <a:xfrm>
             <a:off x="812478" y="1363070"/>
-            <a:ext cx="6597972" cy="923330"/>
+            <a:ext cx="9588822" cy="923330"/>
           </a:xfrm>
           <a:prstGeom prst="rect">
             <a:avLst/>
@@ -6225,7 +6166,7 @@
                 <a:effectLst/>
                 <a:latin typeface="Fira Code" pitchFamily="1" charset="0"/>
               </a:rPr>
-              <a:t>calculate_lbp_histogram</a:t>
+              <a:t>lbp</a:t>
             </a:r>
             <a:r>
               <a:rPr lang="zh-TW" altLang="en-US" b="0" i="0" dirty="0">
@@ -6262,15 +6203,35 @@
             </a:pPr>
             <a:r>
               <a:rPr lang="zh-TW" altLang="en-US" dirty="0"/>
-              <a:t>輸入</a:t>
+              <a:t>輸入圖片</a:t>
+            </a:r>
+            <a:r>
+              <a:rPr lang="en-US" altLang="zh-TW" dirty="0" err="1"/>
+              <a:t>img</a:t>
             </a:r>
             <a:r>
               <a:rPr lang="en-US" altLang="zh-TW" dirty="0"/>
-              <a:t>LBP</a:t>
+              <a:t>, </a:t>
+            </a:r>
+            <a:r>
+              <a:rPr lang="en-US" altLang="zh-TW" dirty="0" err="1"/>
+              <a:t>N_points</a:t>
+            </a:r>
+            <a:r>
+              <a:rPr lang="en-US" altLang="zh-TW" dirty="0"/>
+              <a:t>=8, radius=1</a:t>
             </a:r>
             <a:r>
               <a:rPr lang="zh-TW" altLang="en-US" dirty="0"/>
-              <a:t>特徵圖以及參數，計算直方圖用於相似度比對</a:t>
+              <a:t>，進行</a:t>
+            </a:r>
+            <a:r>
+              <a:rPr lang="en-US" altLang="zh-TW" dirty="0" err="1"/>
+              <a:t>local_binary_pattern</a:t>
+            </a:r>
+            <a:r>
+              <a:rPr lang="zh-TW" altLang="en-US" dirty="0"/>
+              <a:t>特徵提取</a:t>
             </a:r>
             <a:endParaRPr lang="en-US" altLang="zh-TW" dirty="0"/>
           </a:p>
@@ -6318,7 +6279,7 @@
             </a:r>
             <a:r>
               <a:rPr lang="zh-TW" altLang="en-US" dirty="0"/>
-              <a:t>直方圖數值</a:t>
+              <a:t>特徵向量圖</a:t>
             </a:r>
           </a:p>
         </p:txBody>
@@ -6326,7 +6287,7 @@
     </p:spTree>
     <p:extLst>
       <p:ext uri="{BB962C8B-B14F-4D97-AF65-F5344CB8AC3E}">
-        <p14:creationId xmlns:p14="http://schemas.microsoft.com/office/powerpoint/2010/main" val="36422880"/>
+        <p14:creationId xmlns:p14="http://schemas.microsoft.com/office/powerpoint/2010/main" val="2308324488"/>
       </p:ext>
     </p:extLst>
   </p:cSld>
@@ -6424,7 +6385,7 @@
                 <a:effectLst/>
                 <a:latin typeface="Fira Code" pitchFamily="1" charset="0"/>
               </a:rPr>
-              <a:t>calculate_similarity</a:t>
+              <a:t>calculate_lbp_histogram</a:t>
             </a:r>
             <a:r>
               <a:rPr lang="zh-TW" altLang="en-US" b="0" i="0" dirty="0">
@@ -6469,23 +6430,7 @@
             </a:r>
             <a:r>
               <a:rPr lang="zh-TW" altLang="en-US" dirty="0"/>
-              <a:t>特徵圖、</a:t>
-            </a:r>
-            <a:r>
-              <a:rPr lang="en-US" altLang="zh-TW" dirty="0"/>
-              <a:t>LBB</a:t>
-            </a:r>
-            <a:r>
-              <a:rPr lang="zh-TW" altLang="en-US" dirty="0"/>
-              <a:t>直方圖、</a:t>
-            </a:r>
-            <a:r>
-              <a:rPr lang="en-US" altLang="zh-TW" dirty="0"/>
-              <a:t>STRIDE</a:t>
-            </a:r>
-            <a:r>
-              <a:rPr lang="zh-TW" altLang="en-US" dirty="0"/>
-              <a:t>、比對闊值</a:t>
+              <a:t>特徵圖以及參數，計算直方圖用於相似度比對</a:t>
             </a:r>
             <a:endParaRPr lang="en-US" altLang="zh-TW" dirty="0"/>
           </a:p>
@@ -6525,7 +6470,15 @@
             </a:pPr>
             <a:r>
               <a:rPr lang="zh-TW" altLang="en-US" dirty="0"/>
-              <a:t>輸出相似分布值</a:t>
+              <a:t>輸出</a:t>
+            </a:r>
+            <a:r>
+              <a:rPr lang="en-US" altLang="zh-TW" dirty="0"/>
+              <a:t>LBP</a:t>
+            </a:r>
+            <a:r>
+              <a:rPr lang="zh-TW" altLang="en-US" dirty="0"/>
+              <a:t>直方圖數值</a:t>
             </a:r>
           </a:p>
         </p:txBody>
@@ -6533,7 +6486,7 @@
     </p:spTree>
     <p:extLst>
       <p:ext uri="{BB962C8B-B14F-4D97-AF65-F5344CB8AC3E}">
-        <p14:creationId xmlns:p14="http://schemas.microsoft.com/office/powerpoint/2010/main" val="223035563"/>
+        <p14:creationId xmlns:p14="http://schemas.microsoft.com/office/powerpoint/2010/main" val="36422880"/>
       </p:ext>
     </p:extLst>
   </p:cSld>
@@ -6631,6 +6584,213 @@
                 <a:effectLst/>
                 <a:latin typeface="Fira Code" pitchFamily="1" charset="0"/>
               </a:rPr>
+              <a:t>calculate_similarity</a:t>
+            </a:r>
+            <a:r>
+              <a:rPr lang="zh-TW" altLang="en-US" b="0" i="0" dirty="0">
+                <a:solidFill>
+                  <a:srgbClr val="61AFEF"/>
+                </a:solidFill>
+                <a:effectLst/>
+                <a:latin typeface="Fira Code" pitchFamily="1" charset="0"/>
+              </a:rPr>
+              <a:t>：</a:t>
+            </a:r>
+            <a:endParaRPr lang="en-US" altLang="zh-TW" b="0" i="0" dirty="0">
+              <a:solidFill>
+                <a:srgbClr val="61AFEF"/>
+              </a:solidFill>
+              <a:effectLst/>
+              <a:latin typeface="Fira Code" pitchFamily="1" charset="0"/>
+            </a:endParaRPr>
+          </a:p>
+          <a:p>
+            <a:pPr algn="just"/>
+            <a:endParaRPr lang="en-US" altLang="zh-TW" b="0" i="0" dirty="0">
+              <a:solidFill>
+                <a:srgbClr val="61AFEF"/>
+              </a:solidFill>
+              <a:effectLst/>
+              <a:latin typeface="Fira Code" pitchFamily="1" charset="0"/>
+            </a:endParaRPr>
+          </a:p>
+          <a:p>
+            <a:pPr marL="285750" indent="-285750" algn="just">
+              <a:buFont typeface="Arial" panose="020B0604020202020204" pitchFamily="34" charset="0"/>
+              <a:buChar char="•"/>
+            </a:pPr>
+            <a:r>
+              <a:rPr lang="zh-TW" altLang="en-US" dirty="0"/>
+              <a:t>輸入</a:t>
+            </a:r>
+            <a:r>
+              <a:rPr lang="en-US" altLang="zh-TW" dirty="0"/>
+              <a:t>LBP</a:t>
+            </a:r>
+            <a:r>
+              <a:rPr lang="zh-TW" altLang="en-US" dirty="0"/>
+              <a:t>特徵圖、</a:t>
+            </a:r>
+            <a:r>
+              <a:rPr lang="en-US" altLang="zh-TW" dirty="0"/>
+              <a:t>LBB</a:t>
+            </a:r>
+            <a:r>
+              <a:rPr lang="zh-TW" altLang="en-US" dirty="0"/>
+              <a:t>直方圖、</a:t>
+            </a:r>
+            <a:r>
+              <a:rPr lang="en-US" altLang="zh-TW" dirty="0"/>
+              <a:t>STRIDE</a:t>
+            </a:r>
+            <a:r>
+              <a:rPr lang="zh-TW" altLang="en-US" dirty="0"/>
+              <a:t>、比對闊值</a:t>
+            </a:r>
+            <a:endParaRPr lang="en-US" altLang="zh-TW" dirty="0"/>
+          </a:p>
+        </p:txBody>
+      </p:sp>
+      <p:sp>
+        <p:nvSpPr>
+          <p:cNvPr id="4" name="文字方塊 3">
+            <a:extLst>
+              <a:ext uri="{FF2B5EF4-FFF2-40B4-BE49-F238E27FC236}">
+                <a16:creationId xmlns:a16="http://schemas.microsoft.com/office/drawing/2014/main" id="{96FC9653-914C-05A2-70E5-7397996DBDAD}"/>
+              </a:ext>
+            </a:extLst>
+          </p:cNvPr>
+          <p:cNvSpPr txBox="1"/>
+          <p:nvPr/>
+        </p:nvSpPr>
+        <p:spPr>
+          <a:xfrm>
+            <a:off x="812478" y="2286800"/>
+            <a:ext cx="6096000" cy="369332"/>
+          </a:xfrm>
+          <a:prstGeom prst="rect">
+            <a:avLst/>
+          </a:prstGeom>
+          <a:noFill/>
+        </p:spPr>
+        <p:txBody>
+          <a:bodyPr wrap="square">
+            <a:spAutoFit/>
+          </a:bodyPr>
+          <a:lstStyle/>
+          <a:p>
+            <a:pPr marL="285750" indent="-285750">
+              <a:buFont typeface="Arial" panose="020B0604020202020204" pitchFamily="34" charset="0"/>
+              <a:buChar char="•"/>
+            </a:pPr>
+            <a:r>
+              <a:rPr lang="zh-TW" altLang="en-US" dirty="0"/>
+              <a:t>輸出相似分布值</a:t>
+            </a:r>
+          </a:p>
+        </p:txBody>
+      </p:sp>
+    </p:spTree>
+    <p:extLst>
+      <p:ext uri="{BB962C8B-B14F-4D97-AF65-F5344CB8AC3E}">
+        <p14:creationId xmlns:p14="http://schemas.microsoft.com/office/powerpoint/2010/main" val="223035563"/>
+      </p:ext>
+    </p:extLst>
+  </p:cSld>
+  <p:clrMapOvr>
+    <a:masterClrMapping/>
+  </p:clrMapOvr>
+</p:sld>
+</file>
+
+<file path=ppt/slides/slide8.xml><?xml version="1.0" encoding="utf-8"?>
+<p:sld xmlns:a="http://schemas.openxmlformats.org/drawingml/2006/main" xmlns:r="http://schemas.openxmlformats.org/officeDocument/2006/relationships" xmlns:p="http://schemas.openxmlformats.org/presentationml/2006/main">
+  <p:cSld>
+    <p:spTree>
+      <p:nvGrpSpPr>
+        <p:cNvPr id="1" name=""/>
+        <p:cNvGrpSpPr/>
+        <p:nvPr/>
+      </p:nvGrpSpPr>
+      <p:grpSpPr>
+        <a:xfrm>
+          <a:off x="0" y="0"/>
+          <a:ext cx="0" cy="0"/>
+          <a:chOff x="0" y="0"/>
+          <a:chExt cx="0" cy="0"/>
+        </a:xfrm>
+      </p:grpSpPr>
+      <p:sp>
+        <p:nvSpPr>
+          <p:cNvPr id="2" name="標題 1">
+            <a:extLst>
+              <a:ext uri="{FF2B5EF4-FFF2-40B4-BE49-F238E27FC236}">
+                <a16:creationId xmlns:a16="http://schemas.microsoft.com/office/drawing/2014/main" id="{B81DA525-EDE2-4E29-8D18-3F61AD806950}"/>
+              </a:ext>
+            </a:extLst>
+          </p:cNvPr>
+          <p:cNvSpPr>
+            <a:spLocks noGrp="1"/>
+          </p:cNvSpPr>
+          <p:nvPr>
+            <p:ph type="title"/>
+          </p:nvPr>
+        </p:nvSpPr>
+        <p:spPr>
+          <a:xfrm>
+            <a:off x="583394" y="-88086"/>
+            <a:ext cx="10515600" cy="1325563"/>
+          </a:xfrm>
+        </p:spPr>
+        <p:txBody>
+          <a:bodyPr/>
+          <a:lstStyle/>
+          <a:p>
+            <a:r>
+              <a:rPr lang="en-US" altLang="zh-TW" b="1" dirty="0"/>
+              <a:t>API</a:t>
+            </a:r>
+            <a:endParaRPr lang="zh-TW" altLang="en-US" b="1" dirty="0"/>
+          </a:p>
+        </p:txBody>
+      </p:sp>
+      <p:sp>
+        <p:nvSpPr>
+          <p:cNvPr id="102" name="文字方塊 101">
+            <a:extLst>
+              <a:ext uri="{FF2B5EF4-FFF2-40B4-BE49-F238E27FC236}">
+                <a16:creationId xmlns:a16="http://schemas.microsoft.com/office/drawing/2014/main" id="{9237EB1F-043D-F9D8-B294-A62F59C8DB91}"/>
+              </a:ext>
+            </a:extLst>
+          </p:cNvPr>
+          <p:cNvSpPr txBox="1"/>
+          <p:nvPr/>
+        </p:nvSpPr>
+        <p:spPr>
+          <a:xfrm>
+            <a:off x="812478" y="1363070"/>
+            <a:ext cx="6597972" cy="923330"/>
+          </a:xfrm>
+          <a:prstGeom prst="rect">
+            <a:avLst/>
+          </a:prstGeom>
+          <a:noFill/>
+        </p:spPr>
+        <p:txBody>
+          <a:bodyPr wrap="square">
+            <a:spAutoFit/>
+          </a:bodyPr>
+          <a:lstStyle/>
+          <a:p>
+            <a:pPr algn="just"/>
+            <a:r>
+              <a:rPr lang="en-US" altLang="zh-TW" b="0" i="0" dirty="0" err="1">
+                <a:solidFill>
+                  <a:srgbClr val="61AFEF"/>
+                </a:solidFill>
+                <a:effectLst/>
+                <a:latin typeface="Fira Code" pitchFamily="1" charset="0"/>
+              </a:rPr>
               <a:t>overlay_color</a:t>
             </a:r>
             <a:r>
@@ -6726,7 +6886,7 @@
 </p:sld>
 </file>
 
-<file path=ppt/slides/slide8.xml><?xml version="1.0" encoding="utf-8"?>
+<file path=ppt/slides/slide9.xml><?xml version="1.0" encoding="utf-8"?>
 <p:sld xmlns:a="http://schemas.openxmlformats.org/drawingml/2006/main" xmlns:r="http://schemas.openxmlformats.org/officeDocument/2006/relationships" xmlns:p="http://schemas.openxmlformats.org/presentationml/2006/main">
   <p:cSld>
     <p:spTree>
